--- a/Documentation/CaseStudy_Presentation.pptx
+++ b/Documentation/CaseStudy_Presentation.pptx
@@ -5,15 +5,15 @@
     <p:sldMasterId id="2147483648" r:id="rId1"/>
   </p:sldMasterIdLst>
   <p:sldIdLst>
-    <p:sldId id="256" r:id="rId7"/>
-    <p:sldId id="257" r:id="rId8"/>
-    <p:sldId id="258" r:id="rId9"/>
-    <p:sldId id="259" r:id="rId10"/>
-    <p:sldId id="260" r:id="rId11"/>
-    <p:sldId id="261" r:id="rId12"/>
-    <p:sldId id="262" r:id="rId13"/>
+    <p:sldId id="256" r:id="rId2"/>
+    <p:sldId id="257" r:id="rId3"/>
+    <p:sldId id="258" r:id="rId4"/>
+    <p:sldId id="259" r:id="rId5"/>
+    <p:sldId id="260" r:id="rId6"/>
+    <p:sldId id="261" r:id="rId7"/>
+    <p:sldId id="262" r:id="rId8"/>
   </p:sldIdLst>
-  <p:sldSz cx="12188952" cy="6858000" type="screen4x3"/>
+  <p:sldSz cx="12188825" cy="6858000"/>
   <p:notesSz cx="6858000" cy="9144000"/>
   <p:defaultTextStyle>
     <a:defPPr>
@@ -110,6 +110,22 @@
       </a:defRPr>
     </a:lvl9pPr>
   </p:defaultTextStyle>
+  <p:extLst>
+    <p:ext uri="{EFAFB233-063F-42B5-8137-9DF3F51BA10A}">
+      <p15:sldGuideLst xmlns:p15="http://schemas.microsoft.com/office/powerpoint/2012/main">
+        <p15:guide id="1" orient="horz" pos="2160">
+          <p15:clr>
+            <a:srgbClr val="A4A3A4"/>
+          </p15:clr>
+        </p15:guide>
+        <p15:guide id="2" pos="2880">
+          <p15:clr>
+            <a:srgbClr val="A4A3A4"/>
+          </p15:clr>
+        </p15:guide>
+      </p15:sldGuideLst>
+    </p:ext>
+  </p:extLst>
 </p:presentation>
 </file>
 
@@ -151,10 +167,9 @@
           <a:lstStyle/>
           <a:p>
             <a:r>
-              <a:rPr lang="en-US" smtClean="0"/>
+              <a:rPr lang="en-US"/>
               <a:t>Click to edit Master title style</a:t>
             </a:r>
-            <a:endParaRPr lang="en-US"/>
           </a:p>
         </p:txBody>
       </p:sp>
@@ -270,10 +285,9 @@
           </a:lstStyle>
           <a:p>
             <a:r>
-              <a:rPr lang="en-US" smtClean="0"/>
+              <a:rPr lang="en-US"/>
               <a:t>Click to edit Master subtitle style</a:t>
             </a:r>
-            <a:endParaRPr lang="en-US"/>
           </a:p>
         </p:txBody>
       </p:sp>
@@ -294,7 +308,7 @@
           <a:p>
             <a:fld id="{5BCAD085-E8A6-8845-BD4E-CB4CCA059FC4}" type="datetimeFigureOut">
               <a:rPr lang="en-US" smtClean="0"/>
-              <a:t>1/27/13</a:t>
+              <a:t>3/12/26</a:t>
             </a:fld>
             <a:endParaRPr lang="en-US"/>
           </a:p>
@@ -388,10 +402,9 @@
           <a:lstStyle/>
           <a:p>
             <a:r>
-              <a:rPr lang="en-US" smtClean="0"/>
+              <a:rPr lang="en-US"/>
               <a:t>Click to edit Master title style</a:t>
             </a:r>
-            <a:endParaRPr lang="en-US"/>
           </a:p>
         </p:txBody>
       </p:sp>
@@ -412,38 +425,37 @@
           <a:p>
             <a:pPr lvl="0"/>
             <a:r>
-              <a:rPr lang="en-US" smtClean="0"/>
+              <a:rPr lang="en-US"/>
               <a:t>Click to edit Master text styles</a:t>
             </a:r>
           </a:p>
           <a:p>
             <a:pPr lvl="1"/>
             <a:r>
-              <a:rPr lang="en-US" smtClean="0"/>
+              <a:rPr lang="en-US"/>
               <a:t>Second level</a:t>
             </a:r>
           </a:p>
           <a:p>
             <a:pPr lvl="2"/>
             <a:r>
-              <a:rPr lang="en-US" smtClean="0"/>
+              <a:rPr lang="en-US"/>
               <a:t>Third level</a:t>
             </a:r>
           </a:p>
           <a:p>
             <a:pPr lvl="3"/>
             <a:r>
-              <a:rPr lang="en-US" smtClean="0"/>
+              <a:rPr lang="en-US"/>
               <a:t>Fourth level</a:t>
             </a:r>
           </a:p>
           <a:p>
             <a:pPr lvl="4"/>
             <a:r>
-              <a:rPr lang="en-US" smtClean="0"/>
+              <a:rPr lang="en-US"/>
               <a:t>Fifth level</a:t>
             </a:r>
-            <a:endParaRPr lang="en-US"/>
           </a:p>
         </p:txBody>
       </p:sp>
@@ -464,7 +476,7 @@
           <a:p>
             <a:fld id="{5BCAD085-E8A6-8845-BD4E-CB4CCA059FC4}" type="datetimeFigureOut">
               <a:rPr lang="en-US" smtClean="0"/>
-              <a:t>1/27/13</a:t>
+              <a:t>3/12/26</a:t>
             </a:fld>
             <a:endParaRPr lang="en-US"/>
           </a:p>
@@ -563,10 +575,9 @@
           <a:lstStyle/>
           <a:p>
             <a:r>
-              <a:rPr lang="en-US" smtClean="0"/>
+              <a:rPr lang="en-US"/>
               <a:t>Click to edit Master title style</a:t>
             </a:r>
-            <a:endParaRPr lang="en-US"/>
           </a:p>
         </p:txBody>
       </p:sp>
@@ -592,38 +603,37 @@
           <a:p>
             <a:pPr lvl="0"/>
             <a:r>
-              <a:rPr lang="en-US" smtClean="0"/>
+              <a:rPr lang="en-US"/>
               <a:t>Click to edit Master text styles</a:t>
             </a:r>
           </a:p>
           <a:p>
             <a:pPr lvl="1"/>
             <a:r>
-              <a:rPr lang="en-US" smtClean="0"/>
+              <a:rPr lang="en-US"/>
               <a:t>Second level</a:t>
             </a:r>
           </a:p>
           <a:p>
             <a:pPr lvl="2"/>
             <a:r>
-              <a:rPr lang="en-US" smtClean="0"/>
+              <a:rPr lang="en-US"/>
               <a:t>Third level</a:t>
             </a:r>
           </a:p>
           <a:p>
             <a:pPr lvl="3"/>
             <a:r>
-              <a:rPr lang="en-US" smtClean="0"/>
+              <a:rPr lang="en-US"/>
               <a:t>Fourth level</a:t>
             </a:r>
           </a:p>
           <a:p>
             <a:pPr lvl="4"/>
             <a:r>
-              <a:rPr lang="en-US" smtClean="0"/>
+              <a:rPr lang="en-US"/>
               <a:t>Fifth level</a:t>
             </a:r>
-            <a:endParaRPr lang="en-US"/>
           </a:p>
         </p:txBody>
       </p:sp>
@@ -644,7 +654,7 @@
           <a:p>
             <a:fld id="{5BCAD085-E8A6-8845-BD4E-CB4CCA059FC4}" type="datetimeFigureOut">
               <a:rPr lang="en-US" smtClean="0"/>
-              <a:t>1/27/13</a:t>
+              <a:t>3/12/26</a:t>
             </a:fld>
             <a:endParaRPr lang="en-US"/>
           </a:p>
@@ -738,10 +748,9 @@
           <a:lstStyle/>
           <a:p>
             <a:r>
-              <a:rPr lang="en-US" smtClean="0"/>
+              <a:rPr lang="en-US"/>
               <a:t>Click to edit Master title style</a:t>
             </a:r>
-            <a:endParaRPr lang="en-US"/>
           </a:p>
         </p:txBody>
       </p:sp>
@@ -762,38 +771,37 @@
           <a:p>
             <a:pPr lvl="0"/>
             <a:r>
-              <a:rPr lang="en-US" smtClean="0"/>
+              <a:rPr lang="en-US"/>
               <a:t>Click to edit Master text styles</a:t>
             </a:r>
           </a:p>
           <a:p>
             <a:pPr lvl="1"/>
             <a:r>
-              <a:rPr lang="en-US" smtClean="0"/>
+              <a:rPr lang="en-US"/>
               <a:t>Second level</a:t>
             </a:r>
           </a:p>
           <a:p>
             <a:pPr lvl="2"/>
             <a:r>
-              <a:rPr lang="en-US" smtClean="0"/>
+              <a:rPr lang="en-US"/>
               <a:t>Third level</a:t>
             </a:r>
           </a:p>
           <a:p>
             <a:pPr lvl="3"/>
             <a:r>
-              <a:rPr lang="en-US" smtClean="0"/>
+              <a:rPr lang="en-US"/>
               <a:t>Fourth level</a:t>
             </a:r>
           </a:p>
           <a:p>
             <a:pPr lvl="4"/>
             <a:r>
-              <a:rPr lang="en-US" smtClean="0"/>
+              <a:rPr lang="en-US"/>
               <a:t>Fifth level</a:t>
             </a:r>
-            <a:endParaRPr lang="en-US"/>
           </a:p>
         </p:txBody>
       </p:sp>
@@ -814,7 +822,7 @@
           <a:p>
             <a:fld id="{5BCAD085-E8A6-8845-BD4E-CB4CCA059FC4}" type="datetimeFigureOut">
               <a:rPr lang="en-US" smtClean="0"/>
-              <a:t>1/27/13</a:t>
+              <a:t>3/12/26</a:t>
             </a:fld>
             <a:endParaRPr lang="en-US"/>
           </a:p>
@@ -917,10 +925,9 @@
           </a:lstStyle>
           <a:p>
             <a:r>
-              <a:rPr lang="en-US" smtClean="0"/>
+              <a:rPr lang="en-US"/>
               <a:t>Click to edit Master title style</a:t>
             </a:r>
-            <a:endParaRPr lang="en-US"/>
           </a:p>
         </p:txBody>
       </p:sp>
@@ -1037,7 +1044,7 @@
           <a:p>
             <a:pPr lvl="0"/>
             <a:r>
-              <a:rPr lang="en-US" smtClean="0"/>
+              <a:rPr lang="en-US"/>
               <a:t>Click to edit Master text styles</a:t>
             </a:r>
           </a:p>
@@ -1060,7 +1067,7 @@
           <a:p>
             <a:fld id="{5BCAD085-E8A6-8845-BD4E-CB4CCA059FC4}" type="datetimeFigureOut">
               <a:rPr lang="en-US" smtClean="0"/>
-              <a:t>1/27/13</a:t>
+              <a:t>3/12/26</a:t>
             </a:fld>
             <a:endParaRPr lang="en-US"/>
           </a:p>
@@ -1154,10 +1161,9 @@
           <a:lstStyle/>
           <a:p>
             <a:r>
-              <a:rPr lang="en-US" smtClean="0"/>
+              <a:rPr lang="en-US"/>
               <a:t>Click to edit Master title style</a:t>
             </a:r>
-            <a:endParaRPr lang="en-US"/>
           </a:p>
         </p:txBody>
       </p:sp>
@@ -1211,38 +1217,37 @@
           <a:p>
             <a:pPr lvl="0"/>
             <a:r>
-              <a:rPr lang="en-US" smtClean="0"/>
+              <a:rPr lang="en-US"/>
               <a:t>Click to edit Master text styles</a:t>
             </a:r>
           </a:p>
           <a:p>
             <a:pPr lvl="1"/>
             <a:r>
-              <a:rPr lang="en-US" smtClean="0"/>
+              <a:rPr lang="en-US"/>
               <a:t>Second level</a:t>
             </a:r>
           </a:p>
           <a:p>
             <a:pPr lvl="2"/>
             <a:r>
-              <a:rPr lang="en-US" smtClean="0"/>
+              <a:rPr lang="en-US"/>
               <a:t>Third level</a:t>
             </a:r>
           </a:p>
           <a:p>
             <a:pPr lvl="3"/>
             <a:r>
-              <a:rPr lang="en-US" smtClean="0"/>
+              <a:rPr lang="en-US"/>
               <a:t>Fourth level</a:t>
             </a:r>
           </a:p>
           <a:p>
             <a:pPr lvl="4"/>
             <a:r>
-              <a:rPr lang="en-US" smtClean="0"/>
+              <a:rPr lang="en-US"/>
               <a:t>Fifth level</a:t>
             </a:r>
-            <a:endParaRPr lang="en-US"/>
           </a:p>
         </p:txBody>
       </p:sp>
@@ -1296,38 +1301,37 @@
           <a:p>
             <a:pPr lvl="0"/>
             <a:r>
-              <a:rPr lang="en-US" smtClean="0"/>
+              <a:rPr lang="en-US"/>
               <a:t>Click to edit Master text styles</a:t>
             </a:r>
           </a:p>
           <a:p>
             <a:pPr lvl="1"/>
             <a:r>
-              <a:rPr lang="en-US" smtClean="0"/>
+              <a:rPr lang="en-US"/>
               <a:t>Second level</a:t>
             </a:r>
           </a:p>
           <a:p>
             <a:pPr lvl="2"/>
             <a:r>
-              <a:rPr lang="en-US" smtClean="0"/>
+              <a:rPr lang="en-US"/>
               <a:t>Third level</a:t>
             </a:r>
           </a:p>
           <a:p>
             <a:pPr lvl="3"/>
             <a:r>
-              <a:rPr lang="en-US" smtClean="0"/>
+              <a:rPr lang="en-US"/>
               <a:t>Fourth level</a:t>
             </a:r>
           </a:p>
           <a:p>
             <a:pPr lvl="4"/>
             <a:r>
-              <a:rPr lang="en-US" smtClean="0"/>
+              <a:rPr lang="en-US"/>
               <a:t>Fifth level</a:t>
             </a:r>
-            <a:endParaRPr lang="en-US"/>
           </a:p>
         </p:txBody>
       </p:sp>
@@ -1348,7 +1352,7 @@
           <a:p>
             <a:fld id="{5BCAD085-E8A6-8845-BD4E-CB4CCA059FC4}" type="datetimeFigureOut">
               <a:rPr lang="en-US" smtClean="0"/>
-              <a:t>1/27/13</a:t>
+              <a:t>3/12/26</a:t>
             </a:fld>
             <a:endParaRPr lang="en-US"/>
           </a:p>
@@ -1446,10 +1450,9 @@
           </a:lstStyle>
           <a:p>
             <a:r>
-              <a:rPr lang="en-US" smtClean="0"/>
+              <a:rPr lang="en-US"/>
               <a:t>Click to edit Master title style</a:t>
             </a:r>
-            <a:endParaRPr lang="en-US"/>
           </a:p>
         </p:txBody>
       </p:sp>
@@ -1512,7 +1515,7 @@
           <a:p>
             <a:pPr lvl="0"/>
             <a:r>
-              <a:rPr lang="en-US" smtClean="0"/>
+              <a:rPr lang="en-US"/>
               <a:t>Click to edit Master text styles</a:t>
             </a:r>
           </a:p>
@@ -1568,38 +1571,37 @@
           <a:p>
             <a:pPr lvl="0"/>
             <a:r>
-              <a:rPr lang="en-US" smtClean="0"/>
+              <a:rPr lang="en-US"/>
               <a:t>Click to edit Master text styles</a:t>
             </a:r>
           </a:p>
           <a:p>
             <a:pPr lvl="1"/>
             <a:r>
-              <a:rPr lang="en-US" smtClean="0"/>
+              <a:rPr lang="en-US"/>
               <a:t>Second level</a:t>
             </a:r>
           </a:p>
           <a:p>
             <a:pPr lvl="2"/>
             <a:r>
-              <a:rPr lang="en-US" smtClean="0"/>
+              <a:rPr lang="en-US"/>
               <a:t>Third level</a:t>
             </a:r>
           </a:p>
           <a:p>
             <a:pPr lvl="3"/>
             <a:r>
-              <a:rPr lang="en-US" smtClean="0"/>
+              <a:rPr lang="en-US"/>
               <a:t>Fourth level</a:t>
             </a:r>
           </a:p>
           <a:p>
             <a:pPr lvl="4"/>
             <a:r>
-              <a:rPr lang="en-US" smtClean="0"/>
+              <a:rPr lang="en-US"/>
               <a:t>Fifth level</a:t>
             </a:r>
-            <a:endParaRPr lang="en-US"/>
           </a:p>
         </p:txBody>
       </p:sp>
@@ -1662,7 +1664,7 @@
           <a:p>
             <a:pPr lvl="0"/>
             <a:r>
-              <a:rPr lang="en-US" smtClean="0"/>
+              <a:rPr lang="en-US"/>
               <a:t>Click to edit Master text styles</a:t>
             </a:r>
           </a:p>
@@ -1718,38 +1720,37 @@
           <a:p>
             <a:pPr lvl="0"/>
             <a:r>
-              <a:rPr lang="en-US" smtClean="0"/>
+              <a:rPr lang="en-US"/>
               <a:t>Click to edit Master text styles</a:t>
             </a:r>
           </a:p>
           <a:p>
             <a:pPr lvl="1"/>
             <a:r>
-              <a:rPr lang="en-US" smtClean="0"/>
+              <a:rPr lang="en-US"/>
               <a:t>Second level</a:t>
             </a:r>
           </a:p>
           <a:p>
             <a:pPr lvl="2"/>
             <a:r>
-              <a:rPr lang="en-US" smtClean="0"/>
+              <a:rPr lang="en-US"/>
               <a:t>Third level</a:t>
             </a:r>
           </a:p>
           <a:p>
             <a:pPr lvl="3"/>
             <a:r>
-              <a:rPr lang="en-US" smtClean="0"/>
+              <a:rPr lang="en-US"/>
               <a:t>Fourth level</a:t>
             </a:r>
           </a:p>
           <a:p>
             <a:pPr lvl="4"/>
             <a:r>
-              <a:rPr lang="en-US" smtClean="0"/>
+              <a:rPr lang="en-US"/>
               <a:t>Fifth level</a:t>
             </a:r>
-            <a:endParaRPr lang="en-US"/>
           </a:p>
         </p:txBody>
       </p:sp>
@@ -1770,7 +1771,7 @@
           <a:p>
             <a:fld id="{5BCAD085-E8A6-8845-BD4E-CB4CCA059FC4}" type="datetimeFigureOut">
               <a:rPr lang="en-US" smtClean="0"/>
-              <a:t>1/27/13</a:t>
+              <a:t>3/12/26</a:t>
             </a:fld>
             <a:endParaRPr lang="en-US"/>
           </a:p>
@@ -1864,10 +1865,9 @@
           <a:lstStyle/>
           <a:p>
             <a:r>
-              <a:rPr lang="en-US" smtClean="0"/>
+              <a:rPr lang="en-US"/>
               <a:t>Click to edit Master title style</a:t>
             </a:r>
-            <a:endParaRPr lang="en-US"/>
           </a:p>
         </p:txBody>
       </p:sp>
@@ -1888,7 +1888,7 @@
           <a:p>
             <a:fld id="{5BCAD085-E8A6-8845-BD4E-CB4CCA059FC4}" type="datetimeFigureOut">
               <a:rPr lang="en-US" smtClean="0"/>
-              <a:t>1/27/13</a:t>
+              <a:t>3/12/26</a:t>
             </a:fld>
             <a:endParaRPr lang="en-US"/>
           </a:p>
@@ -1983,7 +1983,7 @@
           <a:p>
             <a:fld id="{5BCAD085-E8A6-8845-BD4E-CB4CCA059FC4}" type="datetimeFigureOut">
               <a:rPr lang="en-US" smtClean="0"/>
-              <a:t>1/27/13</a:t>
+              <a:t>3/12/26</a:t>
             </a:fld>
             <a:endParaRPr lang="en-US"/>
           </a:p>
@@ -2086,10 +2086,9 @@
           </a:lstStyle>
           <a:p>
             <a:r>
-              <a:rPr lang="en-US" smtClean="0"/>
+              <a:rPr lang="en-US"/>
               <a:t>Click to edit Master title style</a:t>
             </a:r>
-            <a:endParaRPr lang="en-US"/>
           </a:p>
         </p:txBody>
       </p:sp>
@@ -2143,38 +2142,37 @@
           <a:p>
             <a:pPr lvl="0"/>
             <a:r>
-              <a:rPr lang="en-US" smtClean="0"/>
+              <a:rPr lang="en-US"/>
               <a:t>Click to edit Master text styles</a:t>
             </a:r>
           </a:p>
           <a:p>
             <a:pPr lvl="1"/>
             <a:r>
-              <a:rPr lang="en-US" smtClean="0"/>
+              <a:rPr lang="en-US"/>
               <a:t>Second level</a:t>
             </a:r>
           </a:p>
           <a:p>
             <a:pPr lvl="2"/>
             <a:r>
-              <a:rPr lang="en-US" smtClean="0"/>
+              <a:rPr lang="en-US"/>
               <a:t>Third level</a:t>
             </a:r>
           </a:p>
           <a:p>
             <a:pPr lvl="3"/>
             <a:r>
-              <a:rPr lang="en-US" smtClean="0"/>
+              <a:rPr lang="en-US"/>
               <a:t>Fourth level</a:t>
             </a:r>
           </a:p>
           <a:p>
             <a:pPr lvl="4"/>
             <a:r>
-              <a:rPr lang="en-US" smtClean="0"/>
+              <a:rPr lang="en-US"/>
               <a:t>Fifth level</a:t>
             </a:r>
-            <a:endParaRPr lang="en-US"/>
           </a:p>
         </p:txBody>
       </p:sp>
@@ -2237,7 +2235,7 @@
           <a:p>
             <a:pPr lvl="0"/>
             <a:r>
-              <a:rPr lang="en-US" smtClean="0"/>
+              <a:rPr lang="en-US"/>
               <a:t>Click to edit Master text styles</a:t>
             </a:r>
           </a:p>
@@ -2260,7 +2258,7 @@
           <a:p>
             <a:fld id="{5BCAD085-E8A6-8845-BD4E-CB4CCA059FC4}" type="datetimeFigureOut">
               <a:rPr lang="en-US" smtClean="0"/>
-              <a:t>1/27/13</a:t>
+              <a:t>3/12/26</a:t>
             </a:fld>
             <a:endParaRPr lang="en-US"/>
           </a:p>
@@ -2363,10 +2361,9 @@
           </a:lstStyle>
           <a:p>
             <a:r>
-              <a:rPr lang="en-US" smtClean="0"/>
+              <a:rPr lang="en-US"/>
               <a:t>Click to edit Master title style</a:t>
             </a:r>
-            <a:endParaRPr lang="en-US"/>
           </a:p>
         </p:txBody>
       </p:sp>
@@ -2490,7 +2487,7 @@
           <a:p>
             <a:pPr lvl="0"/>
             <a:r>
-              <a:rPr lang="en-US" smtClean="0"/>
+              <a:rPr lang="en-US"/>
               <a:t>Click to edit Master text styles</a:t>
             </a:r>
           </a:p>
@@ -2513,7 +2510,7 @@
           <a:p>
             <a:fld id="{5BCAD085-E8A6-8845-BD4E-CB4CCA059FC4}" type="datetimeFigureOut">
               <a:rPr lang="en-US" smtClean="0"/>
-              <a:t>1/27/13</a:t>
+              <a:t>3/12/26</a:t>
             </a:fld>
             <a:endParaRPr lang="en-US"/>
           </a:p>
@@ -2622,10 +2619,9 @@
           <a:lstStyle/>
           <a:p>
             <a:r>
-              <a:rPr lang="en-US" smtClean="0"/>
+              <a:rPr lang="en-US"/>
               <a:t>Click to edit Master title style</a:t>
             </a:r>
-            <a:endParaRPr lang="en-US"/>
           </a:p>
         </p:txBody>
       </p:sp>
@@ -2656,38 +2652,37 @@
           <a:p>
             <a:pPr lvl="0"/>
             <a:r>
-              <a:rPr lang="en-US" smtClean="0"/>
+              <a:rPr lang="en-US"/>
               <a:t>Click to edit Master text styles</a:t>
             </a:r>
           </a:p>
           <a:p>
             <a:pPr lvl="1"/>
             <a:r>
-              <a:rPr lang="en-US" smtClean="0"/>
+              <a:rPr lang="en-US"/>
               <a:t>Second level</a:t>
             </a:r>
           </a:p>
           <a:p>
             <a:pPr lvl="2"/>
             <a:r>
-              <a:rPr lang="en-US" smtClean="0"/>
+              <a:rPr lang="en-US"/>
               <a:t>Third level</a:t>
             </a:r>
           </a:p>
           <a:p>
             <a:pPr lvl="3"/>
             <a:r>
-              <a:rPr lang="en-US" smtClean="0"/>
+              <a:rPr lang="en-US"/>
               <a:t>Fourth level</a:t>
             </a:r>
           </a:p>
           <a:p>
             <a:pPr lvl="4"/>
             <a:r>
-              <a:rPr lang="en-US" smtClean="0"/>
+              <a:rPr lang="en-US"/>
               <a:t>Fifth level</a:t>
             </a:r>
-            <a:endParaRPr lang="en-US"/>
           </a:p>
         </p:txBody>
       </p:sp>
@@ -2726,7 +2721,7 @@
           <a:p>
             <a:fld id="{5BCAD085-E8A6-8845-BD4E-CB4CCA059FC4}" type="datetimeFigureOut">
               <a:rPr lang="en-US" smtClean="0"/>
-              <a:t>1/27/13</a:t>
+              <a:t>3/12/26</a:t>
             </a:fld>
             <a:endParaRPr lang="en-US"/>
           </a:p>
@@ -3085,7 +3080,7 @@
 </file>
 
 <file path=ppt/slides/slide1.xml><?xml version="1.0" encoding="utf-8"?>
-<p:sld xmlns:a="http://schemas.openxmlformats.org/drawingml/2006/main" xmlns:p="http://schemas.openxmlformats.org/presentationml/2006/main" xmlns:r="http://schemas.openxmlformats.org/officeDocument/2006/relationships">
+<p:sld xmlns:a="http://schemas.openxmlformats.org/drawingml/2006/main" xmlns:r="http://schemas.openxmlformats.org/officeDocument/2006/relationships" xmlns:p="http://schemas.openxmlformats.org/presentationml/2006/main">
   <p:cSld>
     <p:bg>
       <p:bgPr>
@@ -3101,7 +3096,14 @@
         <p:cNvGrpSpPr/>
         <p:nvPr/>
       </p:nvGrpSpPr>
-      <p:grpSpPr/>
+      <p:grpSpPr>
+        <a:xfrm>
+          <a:off x="0" y="0"/>
+          <a:ext cx="0" cy="0"/>
+          <a:chOff x="0" y="0"/>
+          <a:chExt cx="0" cy="0"/>
+        </a:xfrm>
+      </p:grpSpPr>
       <p:sp>
         <p:nvSpPr>
           <p:cNvPr id="2" name="Rectangle 1"/>
@@ -3142,6 +3144,7 @@
           <a:lstStyle/>
           <a:p>
             <a:pPr algn="ctr"/>
+            <a:endParaRPr/>
           </a:p>
         </p:txBody>
       </p:sp>
@@ -3277,6 +3280,7 @@
           <a:lstStyle/>
           <a:p>
             <a:pPr algn="ctr"/>
+            <a:endParaRPr/>
           </a:p>
         </p:txBody>
       </p:sp>
@@ -3288,29 +3292,58 @@
         </p:nvSpPr>
         <p:spPr>
           <a:xfrm>
-            <a:off x="457200" y="4041648"/>
-            <a:ext cx="11274552" cy="347472"/>
-          </a:xfrm>
-          <a:prstGeom prst="rect">
-            <a:avLst/>
-          </a:prstGeom>
-          <a:noFill/>
-        </p:spPr>
-        <p:txBody>
-          <a:bodyPr wrap="square">
-            <a:spAutoFit/>
-          </a:bodyPr>
-          <a:lstStyle/>
-          <a:p>
-            <a:pPr algn="ctr"/>
-            <a:r>
-              <a:rPr sz="1400" b="1" i="0">
+            <a:off x="467710" y="4041648"/>
+            <a:ext cx="11274552" cy="307777"/>
+          </a:xfrm>
+          <a:prstGeom prst="rect">
+            <a:avLst/>
+          </a:prstGeom>
+          <a:noFill/>
+        </p:spPr>
+        <p:txBody>
+          <a:bodyPr wrap="square">
+            <a:spAutoFit/>
+          </a:bodyPr>
+          <a:lstStyle/>
+          <a:p>
+            <a:pPr algn="ctr"/>
+            <a:r>
+              <a:rPr sz="1400" b="1" i="0" dirty="0">
                 <a:solidFill>
                   <a:srgbClr val="FFFFFF"/>
                 </a:solidFill>
               </a:rPr>
-              <a:t>By  Your Full Name  |  Roll Number</a:t>
-            </a:r>
+              <a:t>By  </a:t>
+            </a:r>
+            <a:r>
+              <a:rPr lang="en-US" sz="1400" b="1" dirty="0">
+                <a:solidFill>
+                  <a:srgbClr val="FFFFFF"/>
+                </a:solidFill>
+              </a:rPr>
+              <a:t>Aareen Dakway</a:t>
+            </a:r>
+            <a:r>
+              <a:rPr sz="1400" b="1" i="0" dirty="0">
+                <a:solidFill>
+                  <a:srgbClr val="FFFFFF"/>
+                </a:solidFill>
+              </a:rPr>
+              <a:t>|  Roll Number</a:t>
+            </a:r>
+            <a:r>
+              <a:rPr lang="en-US" sz="1400" b="1" dirty="0">
+                <a:solidFill>
+                  <a:srgbClr val="FFFFFF"/>
+                </a:solidFill>
+              </a:rPr>
+              <a:t>: 150096725003</a:t>
+            </a:r>
+            <a:endParaRPr sz="1400" b="1" i="0" dirty="0">
+              <a:solidFill>
+                <a:srgbClr val="FFFFFF"/>
+              </a:solidFill>
+            </a:endParaRPr>
           </a:p>
         </p:txBody>
       </p:sp>
@@ -3357,7 +3390,7 @@
 </file>
 
 <file path=ppt/slides/slide2.xml><?xml version="1.0" encoding="utf-8"?>
-<p:sld xmlns:a="http://schemas.openxmlformats.org/drawingml/2006/main" xmlns:p="http://schemas.openxmlformats.org/presentationml/2006/main" xmlns:r="http://schemas.openxmlformats.org/officeDocument/2006/relationships">
+<p:sld xmlns:a="http://schemas.openxmlformats.org/drawingml/2006/main" xmlns:r="http://schemas.openxmlformats.org/officeDocument/2006/relationships" xmlns:p="http://schemas.openxmlformats.org/presentationml/2006/main">
   <p:cSld>
     <p:bg>
       <p:bgPr>
@@ -3373,7 +3406,14 @@
         <p:cNvGrpSpPr/>
         <p:nvPr/>
       </p:nvGrpSpPr>
-      <p:grpSpPr/>
+      <p:grpSpPr>
+        <a:xfrm>
+          <a:off x="0" y="0"/>
+          <a:ext cx="0" cy="0"/>
+          <a:chOff x="0" y="0"/>
+          <a:chExt cx="0" cy="0"/>
+        </a:xfrm>
+      </p:grpSpPr>
       <p:sp>
         <p:nvSpPr>
           <p:cNvPr id="2" name="Rectangle 1"/>
@@ -3414,6 +3454,7 @@
           <a:lstStyle/>
           <a:p>
             <a:pPr algn="ctr"/>
+            <a:endParaRPr/>
           </a:p>
         </p:txBody>
       </p:sp>
@@ -3491,6 +3532,7 @@
           <a:lstStyle/>
           <a:p>
             <a:pPr algn="ctr"/>
+            <a:endParaRPr/>
           </a:p>
         </p:txBody>
       </p:sp>
@@ -3636,6 +3678,7 @@
           <a:lstStyle/>
           <a:p>
             <a:pPr algn="ctr"/>
+            <a:endParaRPr/>
           </a:p>
         </p:txBody>
       </p:sp>
@@ -3679,6 +3722,7 @@
           <a:lstStyle/>
           <a:p>
             <a:pPr algn="ctr"/>
+            <a:endParaRPr/>
           </a:p>
         </p:txBody>
       </p:sp>
@@ -3824,6 +3868,7 @@
           <a:lstStyle/>
           <a:p>
             <a:pPr algn="ctr"/>
+            <a:endParaRPr/>
           </a:p>
         </p:txBody>
       </p:sp>
@@ -3867,6 +3912,7 @@
           <a:lstStyle/>
           <a:p>
             <a:pPr algn="ctr"/>
+            <a:endParaRPr/>
           </a:p>
         </p:txBody>
       </p:sp>
@@ -4012,6 +4058,7 @@
           <a:lstStyle/>
           <a:p>
             <a:pPr algn="ctr"/>
+            <a:endParaRPr/>
           </a:p>
         </p:txBody>
       </p:sp>
@@ -4055,6 +4102,7 @@
           <a:lstStyle/>
           <a:p>
             <a:pPr algn="ctr"/>
+            <a:endParaRPr/>
           </a:p>
         </p:txBody>
       </p:sp>
@@ -4193,7 +4241,7 @@
 </file>
 
 <file path=ppt/slides/slide3.xml><?xml version="1.0" encoding="utf-8"?>
-<p:sld xmlns:a="http://schemas.openxmlformats.org/drawingml/2006/main" xmlns:p="http://schemas.openxmlformats.org/presentationml/2006/main" xmlns:r="http://schemas.openxmlformats.org/officeDocument/2006/relationships">
+<p:sld xmlns:a="http://schemas.openxmlformats.org/drawingml/2006/main" xmlns:r="http://schemas.openxmlformats.org/officeDocument/2006/relationships" xmlns:p="http://schemas.openxmlformats.org/presentationml/2006/main">
   <p:cSld>
     <p:bg>
       <p:bgPr>
@@ -4209,7 +4257,14 @@
         <p:cNvGrpSpPr/>
         <p:nvPr/>
       </p:nvGrpSpPr>
-      <p:grpSpPr/>
+      <p:grpSpPr>
+        <a:xfrm>
+          <a:off x="0" y="0"/>
+          <a:ext cx="0" cy="0"/>
+          <a:chOff x="0" y="0"/>
+          <a:chExt cx="0" cy="0"/>
+        </a:xfrm>
+      </p:grpSpPr>
       <p:sp>
         <p:nvSpPr>
           <p:cNvPr id="2" name="Rectangle 1"/>
@@ -4250,6 +4305,7 @@
           <a:lstStyle/>
           <a:p>
             <a:pPr algn="ctr"/>
+            <a:endParaRPr/>
           </a:p>
         </p:txBody>
       </p:sp>
@@ -4327,6 +4383,7 @@
           <a:lstStyle/>
           <a:p>
             <a:pPr algn="ctr"/>
+            <a:endParaRPr/>
           </a:p>
         </p:txBody>
       </p:sp>
@@ -4406,6 +4463,7 @@
           <a:lstStyle/>
           <a:p>
             <a:pPr algn="ctr"/>
+            <a:endParaRPr/>
           </a:p>
         </p:txBody>
       </p:sp>
@@ -4449,6 +4507,7 @@
           <a:lstStyle/>
           <a:p>
             <a:pPr algn="ctr"/>
+            <a:endParaRPr/>
           </a:p>
         </p:txBody>
       </p:sp>
@@ -4560,6 +4619,7 @@
           <a:lstStyle/>
           <a:p>
             <a:pPr algn="ctr"/>
+            <a:endParaRPr/>
           </a:p>
         </p:txBody>
       </p:sp>
@@ -4705,6 +4765,7 @@
           <a:lstStyle/>
           <a:p>
             <a:pPr algn="ctr"/>
+            <a:endParaRPr/>
           </a:p>
         </p:txBody>
       </p:sp>
@@ -4748,6 +4809,7 @@
           <a:lstStyle/>
           <a:p>
             <a:pPr algn="ctr"/>
+            <a:endParaRPr/>
           </a:p>
         </p:txBody>
       </p:sp>
@@ -4893,6 +4955,7 @@
           <a:lstStyle/>
           <a:p>
             <a:pPr algn="ctr"/>
+            <a:endParaRPr/>
           </a:p>
         </p:txBody>
       </p:sp>
@@ -4936,6 +4999,7 @@
           <a:lstStyle/>
           <a:p>
             <a:pPr algn="ctr"/>
+            <a:endParaRPr/>
           </a:p>
         </p:txBody>
       </p:sp>
@@ -5083,6 +5147,7 @@
           <a:lstStyle/>
           <a:p>
             <a:pPr algn="ctr"/>
+            <a:endParaRPr/>
           </a:p>
         </p:txBody>
       </p:sp>
@@ -5126,6 +5191,7 @@
           <a:lstStyle/>
           <a:p>
             <a:pPr algn="ctr"/>
+            <a:endParaRPr/>
           </a:p>
         </p:txBody>
       </p:sp>
@@ -5237,6 +5303,7 @@
           <a:lstStyle/>
           <a:p>
             <a:pPr algn="ctr"/>
+            <a:endParaRPr/>
           </a:p>
         </p:txBody>
       </p:sp>
@@ -5382,6 +5449,7 @@
           <a:lstStyle/>
           <a:p>
             <a:pPr algn="ctr"/>
+            <a:endParaRPr/>
           </a:p>
         </p:txBody>
       </p:sp>
@@ -5425,6 +5493,7 @@
           <a:lstStyle/>
           <a:p>
             <a:pPr algn="ctr"/>
+            <a:endParaRPr/>
           </a:p>
         </p:txBody>
       </p:sp>
@@ -5570,6 +5639,7 @@
           <a:lstStyle/>
           <a:p>
             <a:pPr algn="ctr"/>
+            <a:endParaRPr/>
           </a:p>
         </p:txBody>
       </p:sp>
@@ -5613,6 +5683,7 @@
           <a:lstStyle/>
           <a:p>
             <a:pPr algn="ctr"/>
+            <a:endParaRPr/>
           </a:p>
         </p:txBody>
       </p:sp>
@@ -5751,7 +5822,7 @@
 </file>
 
 <file path=ppt/slides/slide4.xml><?xml version="1.0" encoding="utf-8"?>
-<p:sld xmlns:a="http://schemas.openxmlformats.org/drawingml/2006/main" xmlns:p="http://schemas.openxmlformats.org/presentationml/2006/main" xmlns:r="http://schemas.openxmlformats.org/officeDocument/2006/relationships">
+<p:sld xmlns:a="http://schemas.openxmlformats.org/drawingml/2006/main" xmlns:r="http://schemas.openxmlformats.org/officeDocument/2006/relationships" xmlns:p="http://schemas.openxmlformats.org/presentationml/2006/main">
   <p:cSld>
     <p:bg>
       <p:bgPr>
@@ -5767,7 +5838,14 @@
         <p:cNvGrpSpPr/>
         <p:nvPr/>
       </p:nvGrpSpPr>
-      <p:grpSpPr/>
+      <p:grpSpPr>
+        <a:xfrm>
+          <a:off x="0" y="0"/>
+          <a:ext cx="0" cy="0"/>
+          <a:chOff x="0" y="0"/>
+          <a:chExt cx="0" cy="0"/>
+        </a:xfrm>
+      </p:grpSpPr>
       <p:sp>
         <p:nvSpPr>
           <p:cNvPr id="2" name="Rectangle 1"/>
@@ -5808,6 +5886,7 @@
           <a:lstStyle/>
           <a:p>
             <a:pPr algn="ctr"/>
+            <a:endParaRPr/>
           </a:p>
         </p:txBody>
       </p:sp>
@@ -5919,6 +5998,7 @@
           <a:lstStyle/>
           <a:p>
             <a:pPr algn="ctr"/>
+            <a:endParaRPr/>
           </a:p>
         </p:txBody>
       </p:sp>
@@ -5996,6 +6076,7 @@
           <a:lstStyle/>
           <a:p>
             <a:pPr algn="ctr"/>
+            <a:endParaRPr/>
           </a:p>
         </p:txBody>
       </p:sp>
@@ -6073,6 +6154,7 @@
           <a:lstStyle/>
           <a:p>
             <a:pPr algn="ctr"/>
+            <a:endParaRPr/>
           </a:p>
         </p:txBody>
       </p:sp>
@@ -6116,6 +6198,7 @@
           <a:lstStyle/>
           <a:p>
             <a:pPr algn="ctr"/>
+            <a:endParaRPr/>
           </a:p>
         </p:txBody>
       </p:sp>
@@ -6193,6 +6276,7 @@
           <a:lstStyle/>
           <a:p>
             <a:pPr algn="ctr"/>
+            <a:endParaRPr/>
           </a:p>
         </p:txBody>
       </p:sp>
@@ -6270,6 +6354,7 @@
           <a:lstStyle/>
           <a:p>
             <a:pPr algn="ctr"/>
+            <a:endParaRPr/>
           </a:p>
         </p:txBody>
       </p:sp>
@@ -6347,6 +6432,7 @@
           <a:lstStyle/>
           <a:p>
             <a:pPr algn="ctr"/>
+            <a:endParaRPr/>
           </a:p>
         </p:txBody>
       </p:sp>
@@ -6424,6 +6510,7 @@
           <a:lstStyle/>
           <a:p>
             <a:pPr algn="ctr"/>
+            <a:endParaRPr/>
           </a:p>
         </p:txBody>
       </p:sp>
@@ -6467,6 +6554,7 @@
           <a:lstStyle/>
           <a:p>
             <a:pPr algn="ctr"/>
+            <a:endParaRPr/>
           </a:p>
         </p:txBody>
       </p:sp>
@@ -6544,6 +6632,7 @@
           <a:lstStyle/>
           <a:p>
             <a:pPr algn="ctr"/>
+            <a:endParaRPr/>
           </a:p>
         </p:txBody>
       </p:sp>
@@ -6621,6 +6710,7 @@
           <a:lstStyle/>
           <a:p>
             <a:pPr algn="ctr"/>
+            <a:endParaRPr/>
           </a:p>
         </p:txBody>
       </p:sp>
@@ -6698,6 +6788,7 @@
           <a:lstStyle/>
           <a:p>
             <a:pPr algn="ctr"/>
+            <a:endParaRPr/>
           </a:p>
         </p:txBody>
       </p:sp>
@@ -6775,6 +6866,7 @@
           <a:lstStyle/>
           <a:p>
             <a:pPr algn="ctr"/>
+            <a:endParaRPr/>
           </a:p>
         </p:txBody>
       </p:sp>
@@ -6818,6 +6910,7 @@
           <a:lstStyle/>
           <a:p>
             <a:pPr algn="ctr"/>
+            <a:endParaRPr/>
           </a:p>
         </p:txBody>
       </p:sp>
@@ -6895,6 +6988,7 @@
           <a:lstStyle/>
           <a:p>
             <a:pPr algn="ctr"/>
+            <a:endParaRPr/>
           </a:p>
         </p:txBody>
       </p:sp>
@@ -6972,6 +7066,7 @@
           <a:lstStyle/>
           <a:p>
             <a:pPr algn="ctr"/>
+            <a:endParaRPr/>
           </a:p>
         </p:txBody>
       </p:sp>
@@ -7049,6 +7144,7 @@
           <a:lstStyle/>
           <a:p>
             <a:pPr algn="ctr"/>
+            <a:endParaRPr/>
           </a:p>
         </p:txBody>
       </p:sp>
@@ -7126,6 +7222,7 @@
           <a:lstStyle/>
           <a:p>
             <a:pPr algn="ctr"/>
+            <a:endParaRPr/>
           </a:p>
         </p:txBody>
       </p:sp>
@@ -7169,6 +7266,7 @@
           <a:lstStyle/>
           <a:p>
             <a:pPr algn="ctr"/>
+            <a:endParaRPr/>
           </a:p>
         </p:txBody>
       </p:sp>
@@ -7246,6 +7344,7 @@
           <a:lstStyle/>
           <a:p>
             <a:pPr algn="ctr"/>
+            <a:endParaRPr/>
           </a:p>
         </p:txBody>
       </p:sp>
@@ -7323,6 +7422,7 @@
           <a:lstStyle/>
           <a:p>
             <a:pPr algn="ctr"/>
+            <a:endParaRPr/>
           </a:p>
         </p:txBody>
       </p:sp>
@@ -7400,6 +7500,7 @@
           <a:lstStyle/>
           <a:p>
             <a:pPr algn="ctr"/>
+            <a:endParaRPr/>
           </a:p>
         </p:txBody>
       </p:sp>
@@ -7477,6 +7578,7 @@
           <a:lstStyle/>
           <a:p>
             <a:pPr algn="ctr"/>
+            <a:endParaRPr/>
           </a:p>
         </p:txBody>
       </p:sp>
@@ -7554,6 +7656,7 @@
           <a:lstStyle/>
           <a:p>
             <a:pPr algn="ctr"/>
+            <a:endParaRPr/>
           </a:p>
         </p:txBody>
       </p:sp>
@@ -7597,6 +7700,7 @@
           <a:lstStyle/>
           <a:p>
             <a:pPr algn="ctr"/>
+            <a:endParaRPr/>
           </a:p>
         </p:txBody>
       </p:sp>
@@ -7674,6 +7778,7 @@
           <a:lstStyle/>
           <a:p>
             <a:pPr algn="ctr"/>
+            <a:endParaRPr/>
           </a:p>
         </p:txBody>
       </p:sp>
@@ -7751,6 +7856,7 @@
           <a:lstStyle/>
           <a:p>
             <a:pPr algn="ctr"/>
+            <a:endParaRPr/>
           </a:p>
         </p:txBody>
       </p:sp>
@@ -7828,6 +7934,7 @@
           <a:lstStyle/>
           <a:p>
             <a:pPr algn="ctr"/>
+            <a:endParaRPr/>
           </a:p>
         </p:txBody>
       </p:sp>
@@ -7905,6 +8012,7 @@
           <a:lstStyle/>
           <a:p>
             <a:pPr algn="ctr"/>
+            <a:endParaRPr/>
           </a:p>
         </p:txBody>
       </p:sp>
@@ -7948,6 +8056,7 @@
           <a:lstStyle/>
           <a:p>
             <a:pPr algn="ctr"/>
+            <a:endParaRPr/>
           </a:p>
         </p:txBody>
       </p:sp>
@@ -8025,6 +8134,7 @@
           <a:lstStyle/>
           <a:p>
             <a:pPr algn="ctr"/>
+            <a:endParaRPr/>
           </a:p>
         </p:txBody>
       </p:sp>
@@ -8102,6 +8212,7 @@
           <a:lstStyle/>
           <a:p>
             <a:pPr algn="ctr"/>
+            <a:endParaRPr/>
           </a:p>
         </p:txBody>
       </p:sp>
@@ -8179,6 +8290,7 @@
           <a:lstStyle/>
           <a:p>
             <a:pPr algn="ctr"/>
+            <a:endParaRPr/>
           </a:p>
         </p:txBody>
       </p:sp>
@@ -8256,6 +8368,7 @@
           <a:lstStyle/>
           <a:p>
             <a:pPr algn="ctr"/>
+            <a:endParaRPr/>
           </a:p>
         </p:txBody>
       </p:sp>
@@ -8299,6 +8412,7 @@
           <a:lstStyle/>
           <a:p>
             <a:pPr algn="ctr"/>
+            <a:endParaRPr/>
           </a:p>
         </p:txBody>
       </p:sp>
@@ -8376,6 +8490,7 @@
           <a:lstStyle/>
           <a:p>
             <a:pPr algn="ctr"/>
+            <a:endParaRPr/>
           </a:p>
         </p:txBody>
       </p:sp>
@@ -8453,6 +8568,7 @@
           <a:lstStyle/>
           <a:p>
             <a:pPr algn="ctr"/>
+            <a:endParaRPr/>
           </a:p>
         </p:txBody>
       </p:sp>
@@ -8530,6 +8646,7 @@
           <a:lstStyle/>
           <a:p>
             <a:pPr algn="ctr"/>
+            <a:endParaRPr/>
           </a:p>
         </p:txBody>
       </p:sp>
@@ -8607,6 +8724,7 @@
           <a:lstStyle/>
           <a:p>
             <a:pPr algn="ctr"/>
+            <a:endParaRPr/>
           </a:p>
         </p:txBody>
       </p:sp>
@@ -8684,6 +8802,7 @@
           <a:lstStyle/>
           <a:p>
             <a:pPr algn="ctr"/>
+            <a:endParaRPr/>
           </a:p>
         </p:txBody>
       </p:sp>
@@ -8727,6 +8846,7 @@
           <a:lstStyle/>
           <a:p>
             <a:pPr algn="ctr"/>
+            <a:endParaRPr/>
           </a:p>
         </p:txBody>
       </p:sp>
@@ -8804,6 +8924,7 @@
           <a:lstStyle/>
           <a:p>
             <a:pPr algn="ctr"/>
+            <a:endParaRPr/>
           </a:p>
         </p:txBody>
       </p:sp>
@@ -8881,6 +9002,7 @@
           <a:lstStyle/>
           <a:p>
             <a:pPr algn="ctr"/>
+            <a:endParaRPr/>
           </a:p>
         </p:txBody>
       </p:sp>
@@ -8958,6 +9080,7 @@
           <a:lstStyle/>
           <a:p>
             <a:pPr algn="ctr"/>
+            <a:endParaRPr/>
           </a:p>
         </p:txBody>
       </p:sp>
@@ -9028,7 +9151,7 @@
 </file>
 
 <file path=ppt/slides/slide5.xml><?xml version="1.0" encoding="utf-8"?>
-<p:sld xmlns:a="http://schemas.openxmlformats.org/drawingml/2006/main" xmlns:p="http://schemas.openxmlformats.org/presentationml/2006/main" xmlns:r="http://schemas.openxmlformats.org/officeDocument/2006/relationships">
+<p:sld xmlns:a="http://schemas.openxmlformats.org/drawingml/2006/main" xmlns:r="http://schemas.openxmlformats.org/officeDocument/2006/relationships" xmlns:p="http://schemas.openxmlformats.org/presentationml/2006/main">
   <p:cSld>
     <p:bg>
       <p:bgPr>
@@ -9044,7 +9167,14 @@
         <p:cNvGrpSpPr/>
         <p:nvPr/>
       </p:nvGrpSpPr>
-      <p:grpSpPr/>
+      <p:grpSpPr>
+        <a:xfrm>
+          <a:off x="0" y="0"/>
+          <a:ext cx="0" cy="0"/>
+          <a:chOff x="0" y="0"/>
+          <a:chExt cx="0" cy="0"/>
+        </a:xfrm>
+      </p:grpSpPr>
       <p:sp>
         <p:nvSpPr>
           <p:cNvPr id="2" name="Rectangle 1"/>
@@ -9085,6 +9215,7 @@
           <a:lstStyle/>
           <a:p>
             <a:pPr algn="ctr"/>
+            <a:endParaRPr/>
           </a:p>
         </p:txBody>
       </p:sp>
@@ -9162,6 +9293,7 @@
           <a:lstStyle/>
           <a:p>
             <a:pPr algn="ctr"/>
+            <a:endParaRPr/>
           </a:p>
         </p:txBody>
       </p:sp>
@@ -9239,6 +9371,7 @@
           <a:lstStyle/>
           <a:p>
             <a:pPr algn="ctr"/>
+            <a:endParaRPr/>
           </a:p>
         </p:txBody>
       </p:sp>
@@ -9350,6 +9483,7 @@
           <a:lstStyle/>
           <a:p>
             <a:pPr algn="ctr"/>
+            <a:endParaRPr/>
           </a:p>
         </p:txBody>
       </p:sp>
@@ -9427,6 +9561,7 @@
           <a:lstStyle/>
           <a:p>
             <a:pPr algn="ctr"/>
+            <a:endParaRPr/>
           </a:p>
         </p:txBody>
       </p:sp>
@@ -9538,6 +9673,7 @@
           <a:lstStyle/>
           <a:p>
             <a:pPr algn="ctr"/>
+            <a:endParaRPr/>
           </a:p>
         </p:txBody>
       </p:sp>
@@ -9615,6 +9751,7 @@
           <a:lstStyle/>
           <a:p>
             <a:pPr algn="ctr"/>
+            <a:endParaRPr/>
           </a:p>
         </p:txBody>
       </p:sp>
@@ -9726,6 +9863,7 @@
           <a:lstStyle/>
           <a:p>
             <a:pPr algn="ctr"/>
+            <a:endParaRPr/>
           </a:p>
         </p:txBody>
       </p:sp>
@@ -9803,6 +9941,7 @@
           <a:lstStyle/>
           <a:p>
             <a:pPr algn="ctr"/>
+            <a:endParaRPr/>
           </a:p>
         </p:txBody>
       </p:sp>
@@ -9914,6 +10053,7 @@
           <a:lstStyle/>
           <a:p>
             <a:pPr algn="ctr"/>
+            <a:endParaRPr/>
           </a:p>
         </p:txBody>
       </p:sp>
@@ -9991,6 +10131,7 @@
           <a:lstStyle/>
           <a:p>
             <a:pPr algn="ctr"/>
+            <a:endParaRPr/>
           </a:p>
         </p:txBody>
       </p:sp>
@@ -10102,6 +10243,7 @@
           <a:lstStyle/>
           <a:p>
             <a:pPr algn="ctr"/>
+            <a:endParaRPr/>
           </a:p>
         </p:txBody>
       </p:sp>
@@ -10179,6 +10321,7 @@
           <a:lstStyle/>
           <a:p>
             <a:pPr algn="ctr"/>
+            <a:endParaRPr/>
           </a:p>
         </p:txBody>
       </p:sp>
@@ -10290,6 +10433,7 @@
           <a:lstStyle/>
           <a:p>
             <a:pPr algn="ctr"/>
+            <a:endParaRPr/>
           </a:p>
         </p:txBody>
       </p:sp>
@@ -10367,6 +10511,7 @@
           <a:lstStyle/>
           <a:p>
             <a:pPr algn="ctr"/>
+            <a:endParaRPr/>
           </a:p>
         </p:txBody>
       </p:sp>
@@ -10512,6 +10657,7 @@
           <a:lstStyle/>
           <a:p>
             <a:pPr algn="ctr"/>
+            <a:endParaRPr/>
           </a:p>
         </p:txBody>
       </p:sp>
@@ -10589,6 +10735,7 @@
           <a:lstStyle/>
           <a:p>
             <a:pPr algn="ctr"/>
+            <a:endParaRPr/>
           </a:p>
         </p:txBody>
       </p:sp>
@@ -10700,6 +10847,7 @@
           <a:lstStyle/>
           <a:p>
             <a:pPr algn="ctr"/>
+            <a:endParaRPr/>
           </a:p>
         </p:txBody>
       </p:sp>
@@ -10777,6 +10925,7 @@
           <a:lstStyle/>
           <a:p>
             <a:pPr algn="ctr"/>
+            <a:endParaRPr/>
           </a:p>
         </p:txBody>
       </p:sp>
@@ -10888,6 +11037,7 @@
           <a:lstStyle/>
           <a:p>
             <a:pPr algn="ctr"/>
+            <a:endParaRPr/>
           </a:p>
         </p:txBody>
       </p:sp>
@@ -10965,6 +11115,7 @@
           <a:lstStyle/>
           <a:p>
             <a:pPr algn="ctr"/>
+            <a:endParaRPr/>
           </a:p>
         </p:txBody>
       </p:sp>
@@ -11076,6 +11227,7 @@
           <a:lstStyle/>
           <a:p>
             <a:pPr algn="ctr"/>
+            <a:endParaRPr/>
           </a:p>
         </p:txBody>
       </p:sp>
@@ -11153,6 +11305,7 @@
           <a:lstStyle/>
           <a:p>
             <a:pPr algn="ctr"/>
+            <a:endParaRPr/>
           </a:p>
         </p:txBody>
       </p:sp>
@@ -11264,6 +11417,7 @@
           <a:lstStyle/>
           <a:p>
             <a:pPr algn="ctr"/>
+            <a:endParaRPr/>
           </a:p>
         </p:txBody>
       </p:sp>
@@ -11341,6 +11495,7 @@
           <a:lstStyle/>
           <a:p>
             <a:pPr algn="ctr"/>
+            <a:endParaRPr/>
           </a:p>
         </p:txBody>
       </p:sp>
@@ -11452,6 +11607,7 @@
           <a:lstStyle/>
           <a:p>
             <a:pPr algn="ctr"/>
+            <a:endParaRPr/>
           </a:p>
         </p:txBody>
       </p:sp>
@@ -11529,6 +11685,7 @@
           <a:lstStyle/>
           <a:p>
             <a:pPr algn="ctr"/>
+            <a:endParaRPr/>
           </a:p>
         </p:txBody>
       </p:sp>
@@ -11640,6 +11797,7 @@
           <a:lstStyle/>
           <a:p>
             <a:pPr algn="ctr"/>
+            <a:endParaRPr/>
           </a:p>
         </p:txBody>
       </p:sp>
@@ -11717,6 +11875,7 @@
           <a:lstStyle/>
           <a:p>
             <a:pPr algn="ctr"/>
+            <a:endParaRPr/>
           </a:p>
         </p:txBody>
       </p:sp>
@@ -11862,6 +12021,7 @@
           <a:lstStyle/>
           <a:p>
             <a:pPr algn="ctr"/>
+            <a:endParaRPr/>
           </a:p>
         </p:txBody>
       </p:sp>
@@ -11905,6 +12065,7 @@
           <a:lstStyle/>
           <a:p>
             <a:pPr algn="ctr"/>
+            <a:endParaRPr/>
           </a:p>
         </p:txBody>
       </p:sp>
@@ -12084,6 +12245,7 @@
           <a:lstStyle/>
           <a:p>
             <a:pPr algn="ctr"/>
+            <a:endParaRPr/>
           </a:p>
         </p:txBody>
       </p:sp>
@@ -12127,6 +12289,7 @@
           <a:lstStyle/>
           <a:p>
             <a:pPr algn="ctr"/>
+            <a:endParaRPr/>
           </a:p>
         </p:txBody>
       </p:sp>
@@ -12333,7 +12496,7 @@
 </file>
 
 <file path=ppt/slides/slide6.xml><?xml version="1.0" encoding="utf-8"?>
-<p:sld xmlns:a="http://schemas.openxmlformats.org/drawingml/2006/main" xmlns:p="http://schemas.openxmlformats.org/presentationml/2006/main" xmlns:r="http://schemas.openxmlformats.org/officeDocument/2006/relationships">
+<p:sld xmlns:a="http://schemas.openxmlformats.org/drawingml/2006/main" xmlns:r="http://schemas.openxmlformats.org/officeDocument/2006/relationships" xmlns:p="http://schemas.openxmlformats.org/presentationml/2006/main">
   <p:cSld>
     <p:bg>
       <p:bgPr>
@@ -12349,7 +12512,14 @@
         <p:cNvGrpSpPr/>
         <p:nvPr/>
       </p:nvGrpSpPr>
-      <p:grpSpPr/>
+      <p:grpSpPr>
+        <a:xfrm>
+          <a:off x="0" y="0"/>
+          <a:ext cx="0" cy="0"/>
+          <a:chOff x="0" y="0"/>
+          <a:chExt cx="0" cy="0"/>
+        </a:xfrm>
+      </p:grpSpPr>
       <p:sp>
         <p:nvSpPr>
           <p:cNvPr id="2" name="Rectangle 1"/>
@@ -12390,6 +12560,7 @@
           <a:lstStyle/>
           <a:p>
             <a:pPr algn="ctr"/>
+            <a:endParaRPr/>
           </a:p>
         </p:txBody>
       </p:sp>
@@ -12501,6 +12672,7 @@
           <a:lstStyle/>
           <a:p>
             <a:pPr algn="ctr"/>
+            <a:endParaRPr/>
           </a:p>
         </p:txBody>
       </p:sp>
@@ -12544,6 +12716,7 @@
           <a:lstStyle/>
           <a:p>
             <a:pPr algn="ctr"/>
+            <a:endParaRPr/>
           </a:p>
         </p:txBody>
       </p:sp>
@@ -12723,6 +12896,7 @@
           <a:lstStyle/>
           <a:p>
             <a:pPr algn="ctr"/>
+            <a:endParaRPr/>
           </a:p>
         </p:txBody>
       </p:sp>
@@ -12766,6 +12940,7 @@
           <a:lstStyle/>
           <a:p>
             <a:pPr algn="ctr"/>
+            <a:endParaRPr/>
           </a:p>
         </p:txBody>
       </p:sp>
@@ -12945,6 +13120,7 @@
           <a:lstStyle/>
           <a:p>
             <a:pPr algn="ctr"/>
+            <a:endParaRPr/>
           </a:p>
         </p:txBody>
       </p:sp>
@@ -12988,6 +13164,7 @@
           <a:lstStyle/>
           <a:p>
             <a:pPr algn="ctr"/>
+            <a:endParaRPr/>
           </a:p>
         </p:txBody>
       </p:sp>
@@ -13167,6 +13344,7 @@
           <a:lstStyle/>
           <a:p>
             <a:pPr algn="ctr"/>
+            <a:endParaRPr/>
           </a:p>
         </p:txBody>
       </p:sp>
@@ -13210,6 +13388,7 @@
           <a:lstStyle/>
           <a:p>
             <a:pPr algn="ctr"/>
+            <a:endParaRPr/>
           </a:p>
         </p:txBody>
       </p:sp>
@@ -13389,6 +13568,7 @@
           <a:lstStyle/>
           <a:p>
             <a:pPr algn="ctr"/>
+            <a:endParaRPr/>
           </a:p>
         </p:txBody>
       </p:sp>
@@ -13432,6 +13612,7 @@
           <a:lstStyle/>
           <a:p>
             <a:pPr algn="ctr"/>
+            <a:endParaRPr/>
           </a:p>
         </p:txBody>
       </p:sp>
@@ -13611,6 +13792,7 @@
           <a:lstStyle/>
           <a:p>
             <a:pPr algn="ctr"/>
+            <a:endParaRPr/>
           </a:p>
         </p:txBody>
       </p:sp>
@@ -13681,7 +13863,7 @@
 </file>
 
 <file path=ppt/slides/slide7.xml><?xml version="1.0" encoding="utf-8"?>
-<p:sld xmlns:a="http://schemas.openxmlformats.org/drawingml/2006/main" xmlns:p="http://schemas.openxmlformats.org/presentationml/2006/main" xmlns:r="http://schemas.openxmlformats.org/officeDocument/2006/relationships">
+<p:sld xmlns:a="http://schemas.openxmlformats.org/drawingml/2006/main" xmlns:r="http://schemas.openxmlformats.org/officeDocument/2006/relationships" xmlns:p="http://schemas.openxmlformats.org/presentationml/2006/main">
   <p:cSld>
     <p:bg>
       <p:bgPr>
@@ -13697,7 +13879,14 @@
         <p:cNvGrpSpPr/>
         <p:nvPr/>
       </p:nvGrpSpPr>
-      <p:grpSpPr/>
+      <p:grpSpPr>
+        <a:xfrm>
+          <a:off x="0" y="0"/>
+          <a:ext cx="0" cy="0"/>
+          <a:chOff x="0" y="0"/>
+          <a:chExt cx="0" cy="0"/>
+        </a:xfrm>
+      </p:grpSpPr>
       <p:sp>
         <p:nvSpPr>
           <p:cNvPr id="2" name="Rectangle 1"/>
@@ -13738,6 +13927,7 @@
           <a:lstStyle/>
           <a:p>
             <a:pPr algn="ctr"/>
+            <a:endParaRPr/>
           </a:p>
         </p:txBody>
       </p:sp>
